--- a/Soutenance_Chess_Bot_v1.pptx
+++ b/Soutenance_Chess_Bot_v1.pptx
@@ -525,7 +525,7 @@
           <a:p/>
           <a:p>
             <a:r>
-              <a:t>Bonjour. Nous presentons Chess Bot v1 : un reseau de neurones qui choisit un coup d'echecs directement a partir de la position, sans explorer la moindre variante future. C'est cette absence de recherche qui rend le projet interessant, et on va vous montrer ce qu'un petit modele arrive a apprendre, et surtout ses limites. Je suis [X], voici [Y], on se repartit la presentation.</a:t>
+              <a:t>Bonjour. Nous presentons Chess Bot v1 : un reseau de neurones qui choisit un coup d'echecs directement a partir de la position, sans explorer la moindre variante future. C'est cette absence de recherche qui rend le projet interessant, et on va vous montrer ce qu'un petit modele arrive a apprendre, et surtout ses limites. Je suis Naadjath, voici Rajaa, on se repartit la presentation.</a:t>
             </a:r>
           </a:p>
         </p:txBody>
@@ -1057,7 +1057,7 @@
           <a:p/>
           <a:p>
             <a:r>
-              <a:t>Un mot sur l'organisation du binome. On s'est reparti le travail en deux axes clairs : [Prenom] a pris en charge les donnees et le modele, extraction, filtrage, encodage, architecture et entrainement du Transformer. [Prenom] s'est occupe de l'evaluation et de l'application, les moteurs de reference, le calcul d'Elo, la campagne contre Stockfish et l'interface de jeu. Le tout est versionne sur Git, avec un historique de commits qui retrace la progression. On a rencontre de vraies difficultes techniques, pas seulement conceptuelles : la lecture des donnees etait au depart 18 fois trop lente, corrigee en changeant de strategie de filtrage ; le calcul d'Elo donnait un resultat infini a 100 % de victoires, corrige avec la methode de Wilson ; et l'environnement Colab gratuit se deconnectait regulierement, ce qu'on a contourne en sauvegardant le modele sur Google Drive a chaque epoque.</a:t>
+              <a:t>Un mot sur l'organisation du binome. On n'a pas fige un partage strict des taches : on a avance en binome sur l'ensemble de la chaine, donnees, modele, evaluation et application, en se repartissant le travail au fur et a mesure selon les priorites. Le tout est versionne sur Git, avec un historique de commits des deux membres qui retrace la progression. On a rencontre de vraies difficultes techniques, pas seulement conceptuelles : la lecture des donnees etait au depart 18 fois trop lente, corrigee en changeant de strategie de filtrage ; le calcul d'Elo donnait un resultat infini a 100 % de victoires, corrige avec la methode de Wilson ; et l'environnement Colab gratuit se deconnectait regulierement, ce qu'on a contourne en sauvegardant le modele sur Google Drive a chaque epoque.</a:t>
             </a:r>
           </a:p>
         </p:txBody>
@@ -4892,7 +4892,7 @@
                 </a:solidFill>
                 <a:latin typeface="Segoe UI"/>
               </a:rPr>
-              <a:t>Projet de fin de Bachelor</a:t>
+              <a:t>Projet de substitution au stage</a:t>
             </a:r>
           </a:p>
           <a:p>
@@ -4908,7 +4908,7 @@
                 </a:solidFill>
                 <a:latin typeface="Segoe UI"/>
               </a:rPr>
-              <a:t>[Prenom NOM] &amp; [Prenom NOM]</a:t>
+              <a:t>SEIBOU Naadjath &amp; LAKRA Rajaa</a:t>
             </a:r>
           </a:p>
           <a:p>
@@ -4924,7 +4924,7 @@
                 </a:solidFill>
                 <a:latin typeface="Segoe UI"/>
               </a:rPr>
-              <a:t>[Etablissement], 24 aout 2026</a:t>
+              <a:t>ECE, soutenance semaine du 31 aout 2026</a:t>
             </a:r>
           </a:p>
         </p:txBody>
@@ -6717,7 +6717,7 @@
                 </a:solidFill>
                 <a:latin typeface="Segoe UI"/>
               </a:rPr>
-              <a:t>[Prenom] : donnees et modele</a:t>
+              <a:t>Naadjath &amp; Rajaa</a:t>
             </a:r>
           </a:p>
           <a:p>
@@ -6733,7 +6733,7 @@
                 </a:solidFill>
                 <a:latin typeface="Segoe UI"/>
               </a:rPr>
-              <a:t>     extraction/filtrage des parties, encodage des positions, architecture et entrainement du Transformer.</a:t>
+              <a:t>     travail mixte sur l'ensemble de la chaine plutot qu'une repartition stricte par axe : donnees, modele, evaluation et application ont ete avancees en binome.</a:t>
             </a:r>
           </a:p>
           <a:p>
@@ -6758,7 +6758,7 @@
                 </a:solidFill>
                 <a:latin typeface="Segoe UI"/>
               </a:rPr>
-              <a:t>[Prenom] : evaluation et application</a:t>
+              <a:t>Suivi</a:t>
             </a:r>
           </a:p>
           <a:p>
@@ -6774,7 +6774,7 @@
                 </a:solidFill>
                 <a:latin typeface="Segoe UI"/>
               </a:rPr>
-              <a:t>     moteurs de reference, calcul d'Elo, campagne contre Stockfish, application de jeu.</a:t>
+              <a:t>     Git/GitHub avec des commits reguliers des deux membres, ce qui retrace la progression reelle du projet.</a:t>
             </a:r>
           </a:p>
           <a:p>
